--- a/.claude/agents/proposal-generator-agent/scripts/out/Pricing_Plans.pptx
+++ b/.claude/agents/proposal-generator-agent/scripts/out/Pricing_Plans.pptx
@@ -3119,7 +3119,7 @@
                 </a:solidFill>
                 <a:latin typeface="Calibri"/>
               </a:rPr>
-              <a:t>Our Three Plans</a:t>
+              <a:t>Our Pricing</a:t>
             </a:r>
           </a:p>
         </p:txBody>
@@ -3132,8 +3132,8 @@
         </p:nvSpPr>
         <p:spPr>
           <a:xfrm>
-            <a:off x="563727" y="1188720"/>
-            <a:ext cx="3474720" cy="4572000"/>
+            <a:off x="3581247" y="1188720"/>
+            <a:ext cx="5029200" cy="4572000"/>
           </a:xfrm>
           <a:prstGeom prst="rect">
             <a:avLst/>
@@ -3178,8 +3178,8 @@
         </p:nvSpPr>
         <p:spPr>
           <a:xfrm>
-            <a:off x="563727" y="1188720"/>
-            <a:ext cx="3474720" cy="777240"/>
+            <a:off x="3581247" y="1188720"/>
+            <a:ext cx="5029200" cy="777240"/>
           </a:xfrm>
           <a:prstGeom prst="rect">
             <a:avLst/>
@@ -3222,8 +3222,8 @@
         </p:nvSpPr>
         <p:spPr>
           <a:xfrm>
-            <a:off x="563727" y="1234440"/>
-            <a:ext cx="3474720" cy="274320"/>
+            <a:off x="3581247" y="1234440"/>
+            <a:ext cx="5029200" cy="274320"/>
           </a:xfrm>
           <a:prstGeom prst="rect">
             <a:avLst/>
@@ -3244,7 +3244,7 @@
                 </a:solidFill>
                 <a:latin typeface="Calibri"/>
               </a:rPr>
-              <a:t>Plan A</a:t>
+              <a:t>Percentage of Ad Spend</a:t>
             </a:r>
           </a:p>
         </p:txBody>
@@ -3257,8 +3257,8 @@
         </p:nvSpPr>
         <p:spPr>
           <a:xfrm>
-            <a:off x="563727" y="1481328"/>
-            <a:ext cx="3474720" cy="457200"/>
+            <a:off x="3581247" y="1481328"/>
+            <a:ext cx="5029200" cy="457200"/>
           </a:xfrm>
           <a:prstGeom prst="rect">
             <a:avLst/>
@@ -3279,7 +3279,7 @@
                 </a:solidFill>
                 <a:latin typeface="Calibri"/>
               </a:rPr>
-              <a:t>GROWTH</a:t>
+              <a:t>MANAGEMENT FEE</a:t>
             </a:r>
           </a:p>
         </p:txBody>
@@ -3292,78 +3292,8 @@
         </p:nvSpPr>
         <p:spPr>
           <a:xfrm>
-            <a:off x="792327" y="2130552"/>
-            <a:ext cx="3017520" cy="228600"/>
-          </a:xfrm>
-          <a:prstGeom prst="rect">
-            <a:avLst/>
-          </a:prstGeom>
-          <a:noFill/>
-        </p:spPr>
-        <p:txBody>
-          <a:bodyPr wrap="square" anchor="t" lIns="0" rIns="0" tIns="0" bIns="0">
-            <a:spAutoFit/>
-          </a:bodyPr>
-          <a:lstStyle/>
-          <a:p>
-            <a:pPr algn="ctr"/>
-            <a:r>
-              <a:rPr sz="900" b="1">
-                <a:solidFill>
-                  <a:srgbClr val="6B7280"/>
-                </a:solidFill>
-                <a:latin typeface="Calibri"/>
-              </a:rPr>
-              <a:t>BASE FEE</a:t>
-            </a:r>
-          </a:p>
-        </p:txBody>
-      </p:sp>
-      <p:sp>
-        <p:nvSpPr>
-          <p:cNvPr id="8" name="TextBox 7"/>
-          <p:cNvSpPr txBox="1"/>
-          <p:nvPr/>
-        </p:nvSpPr>
-        <p:spPr>
-          <a:xfrm>
-            <a:off x="792327" y="2368296"/>
-            <a:ext cx="3017520" cy="640080"/>
-          </a:xfrm>
-          <a:prstGeom prst="rect">
-            <a:avLst/>
-          </a:prstGeom>
-          <a:noFill/>
-        </p:spPr>
-        <p:txBody>
-          <a:bodyPr wrap="square" anchor="t" lIns="0" rIns="0" tIns="0" bIns="0">
-            <a:spAutoFit/>
-          </a:bodyPr>
-          <a:lstStyle/>
-          <a:p>
-            <a:pPr algn="ctr"/>
-            <a:r>
-              <a:rPr sz="1200" b="1">
-                <a:solidFill>
-                  <a:srgbClr val="111827"/>
-                </a:solidFill>
-                <a:latin typeface="Calibri"/>
-              </a:rPr>
-              <a:t>$0/mo</a:t>
-            </a:r>
-          </a:p>
-        </p:txBody>
-      </p:sp>
-      <p:sp>
-        <p:nvSpPr>
-          <p:cNvPr id="9" name="TextBox 8"/>
-          <p:cNvSpPr txBox="1"/>
-          <p:nvPr/>
-        </p:nvSpPr>
-        <p:spPr>
-          <a:xfrm>
-            <a:off x="792327" y="3044952"/>
-            <a:ext cx="3017520" cy="228600"/>
+            <a:off x="3809847" y="2130552"/>
+            <a:ext cx="4572000" cy="228600"/>
           </a:xfrm>
           <a:prstGeom prst="rect">
             <a:avLst/>
@@ -3391,14 +3321,14 @@
       </p:sp>
       <p:sp>
         <p:nvSpPr>
-          <p:cNvPr id="10" name="TextBox 9"/>
+          <p:cNvPr id="8" name="TextBox 7"/>
           <p:cNvSpPr txBox="1"/>
           <p:nvPr/>
         </p:nvSpPr>
         <p:spPr>
           <a:xfrm>
-            <a:off x="792327" y="3282696"/>
-            <a:ext cx="3017520" cy="640080"/>
+            <a:off x="3809847" y="2368296"/>
+            <a:ext cx="4572000" cy="640080"/>
           </a:xfrm>
           <a:prstGeom prst="rect">
             <a:avLst/>
@@ -3420,8 +3350,78 @@
                 <a:latin typeface="Calibri"/>
               </a:rPr>
               <a:t>20% up to $30k
-15% from $30k–$60k
+15% from $30k-$60k
 10% above $60k</a:t>
+            </a:r>
+          </a:p>
+        </p:txBody>
+      </p:sp>
+      <p:sp>
+        <p:nvSpPr>
+          <p:cNvPr id="9" name="TextBox 8"/>
+          <p:cNvSpPr txBox="1"/>
+          <p:nvPr/>
+        </p:nvSpPr>
+        <p:spPr>
+          <a:xfrm>
+            <a:off x="3809847" y="3044952"/>
+            <a:ext cx="4572000" cy="228600"/>
+          </a:xfrm>
+          <a:prstGeom prst="rect">
+            <a:avLst/>
+          </a:prstGeom>
+          <a:noFill/>
+        </p:spPr>
+        <p:txBody>
+          <a:bodyPr wrap="square" anchor="t" lIns="0" rIns="0" tIns="0" bIns="0">
+            <a:spAutoFit/>
+          </a:bodyPr>
+          <a:lstStyle/>
+          <a:p>
+            <a:pPr algn="ctr"/>
+            <a:r>
+              <a:rPr sz="900" b="1">
+                <a:solidFill>
+                  <a:srgbClr val="6B7280"/>
+                </a:solidFill>
+                <a:latin typeface="Calibri"/>
+              </a:rPr>
+              <a:t>MINIMUM FEE</a:t>
+            </a:r>
+          </a:p>
+        </p:txBody>
+      </p:sp>
+      <p:sp>
+        <p:nvSpPr>
+          <p:cNvPr id="10" name="TextBox 9"/>
+          <p:cNvSpPr txBox="1"/>
+          <p:nvPr/>
+        </p:nvSpPr>
+        <p:spPr>
+          <a:xfrm>
+            <a:off x="3809847" y="3282696"/>
+            <a:ext cx="4572000" cy="640080"/>
+          </a:xfrm>
+          <a:prstGeom prst="rect">
+            <a:avLst/>
+          </a:prstGeom>
+          <a:noFill/>
+        </p:spPr>
+        <p:txBody>
+          <a:bodyPr wrap="square" anchor="t" lIns="0" rIns="0" tIns="0" bIns="0">
+            <a:spAutoFit/>
+          </a:bodyPr>
+          <a:lstStyle/>
+          <a:p>
+            <a:pPr algn="ctr"/>
+            <a:r>
+              <a:rPr sz="1200" b="1">
+                <a:solidFill>
+                  <a:srgbClr val="111827"/>
+                </a:solidFill>
+                <a:latin typeface="Calibri"/>
+              </a:rPr>
+              <a:t>$1,500 per platform</a:t>
             </a:r>
           </a:p>
         </p:txBody>
@@ -3434,8 +3434,8 @@
         </p:nvSpPr>
         <p:spPr>
           <a:xfrm>
-            <a:off x="792327" y="3959352"/>
-            <a:ext cx="3017520" cy="228600"/>
+            <a:off x="3809847" y="3959352"/>
+            <a:ext cx="4572000" cy="228600"/>
           </a:xfrm>
           <a:prstGeom prst="rect">
             <a:avLst/>
@@ -3469,8 +3469,8 @@
         </p:nvSpPr>
         <p:spPr>
           <a:xfrm>
-            <a:off x="792327" y="4197096"/>
-            <a:ext cx="3017520" cy="640080"/>
+            <a:off x="3809847" y="4197096"/>
+            <a:ext cx="4572000" cy="640080"/>
           </a:xfrm>
           <a:prstGeom prst="rect">
             <a:avLst/>
@@ -3504,8 +3504,8 @@
         </p:nvSpPr>
         <p:spPr>
           <a:xfrm>
-            <a:off x="792327" y="4873752"/>
-            <a:ext cx="3017520" cy="228600"/>
+            <a:off x="3809847" y="4873752"/>
+            <a:ext cx="4572000" cy="228600"/>
           </a:xfrm>
           <a:prstGeom prst="rect">
             <a:avLst/>
@@ -3539,8 +3539,8 @@
         </p:nvSpPr>
         <p:spPr>
           <a:xfrm>
-            <a:off x="792327" y="5111496"/>
-            <a:ext cx="3017520" cy="640080"/>
+            <a:off x="3809847" y="5111496"/>
+            <a:ext cx="4572000" cy="640080"/>
           </a:xfrm>
           <a:prstGeom prst="rect">
             <a:avLst/>
@@ -3568,890 +3568,7 @@
       </p:sp>
       <p:sp>
         <p:nvSpPr>
-          <p:cNvPr id="15" name="Rectangle 14"/>
-          <p:cNvSpPr/>
-          <p:nvPr/>
-        </p:nvSpPr>
-        <p:spPr>
-          <a:xfrm>
-            <a:off x="4358487" y="1188720"/>
-            <a:ext cx="3474720" cy="4572000"/>
-          </a:xfrm>
-          <a:prstGeom prst="rect">
-            <a:avLst/>
-          </a:prstGeom>
-          <a:solidFill>
-            <a:srgbClr val="F9FAFB"/>
-          </a:solidFill>
-          <a:ln w="9525">
-            <a:solidFill>
-              <a:srgbClr val="E5E7EB"/>
-            </a:solidFill>
-          </a:ln>
-          <a:effectLst/>
-        </p:spPr>
-        <p:style>
-          <a:lnRef idx="1">
-            <a:schemeClr val="accent1"/>
-          </a:lnRef>
-          <a:fillRef idx="3">
-            <a:schemeClr val="accent1"/>
-          </a:fillRef>
-          <a:effectRef idx="2">
-            <a:schemeClr val="accent1"/>
-          </a:effectRef>
-          <a:fontRef idx="minor">
-            <a:schemeClr val="lt1"/>
-          </a:fontRef>
-        </p:style>
-        <p:txBody>
-          <a:bodyPr rtlCol="0" anchor="ctr"/>
-          <a:lstStyle/>
-          <a:p>
-            <a:pPr algn="ctr"/>
-          </a:p>
-        </p:txBody>
-      </p:sp>
-      <p:sp>
-        <p:nvSpPr>
-          <p:cNvPr id="16" name="Rectangle 15"/>
-          <p:cNvSpPr/>
-          <p:nvPr/>
-        </p:nvSpPr>
-        <p:spPr>
-          <a:xfrm>
-            <a:off x="4358487" y="1188720"/>
-            <a:ext cx="3474720" cy="777240"/>
-          </a:xfrm>
-          <a:prstGeom prst="rect">
-            <a:avLst/>
-          </a:prstGeom>
-          <a:solidFill>
-            <a:srgbClr val="1A56DB"/>
-          </a:solidFill>
-          <a:ln>
-            <a:noFill/>
-          </a:ln>
-          <a:effectLst/>
-        </p:spPr>
-        <p:style>
-          <a:lnRef idx="1">
-            <a:schemeClr val="accent1"/>
-          </a:lnRef>
-          <a:fillRef idx="3">
-            <a:schemeClr val="accent1"/>
-          </a:fillRef>
-          <a:effectRef idx="2">
-            <a:schemeClr val="accent1"/>
-          </a:effectRef>
-          <a:fontRef idx="minor">
-            <a:schemeClr val="lt1"/>
-          </a:fontRef>
-        </p:style>
-        <p:txBody>
-          <a:bodyPr rtlCol="0" anchor="ctr"/>
-          <a:lstStyle/>
-          <a:p>
-            <a:pPr algn="ctr"/>
-          </a:p>
-        </p:txBody>
-      </p:sp>
-      <p:sp>
-        <p:nvSpPr>
-          <p:cNvPr id="17" name="TextBox 16"/>
-          <p:cNvSpPr txBox="1"/>
-          <p:nvPr/>
-        </p:nvSpPr>
-        <p:spPr>
-          <a:xfrm>
-            <a:off x="4358487" y="1234440"/>
-            <a:ext cx="3474720" cy="274320"/>
-          </a:xfrm>
-          <a:prstGeom prst="rect">
-            <a:avLst/>
-          </a:prstGeom>
-          <a:noFill/>
-        </p:spPr>
-        <p:txBody>
-          <a:bodyPr wrap="square" anchor="t" lIns="0" rIns="0" tIns="0" bIns="0">
-            <a:spAutoFit/>
-          </a:bodyPr>
-          <a:lstStyle/>
-          <a:p>
-            <a:pPr algn="ctr"/>
-            <a:r>
-              <a:rPr sz="1200" b="0">
-                <a:solidFill>
-                  <a:srgbClr val="FFFFFF"/>
-                </a:solidFill>
-                <a:latin typeface="Calibri"/>
-              </a:rPr>
-              <a:t>Plan B</a:t>
-            </a:r>
-          </a:p>
-        </p:txBody>
-      </p:sp>
-      <p:sp>
-        <p:nvSpPr>
-          <p:cNvPr id="18" name="TextBox 17"/>
-          <p:cNvSpPr txBox="1"/>
-          <p:nvPr/>
-        </p:nvSpPr>
-        <p:spPr>
-          <a:xfrm>
-            <a:off x="4358487" y="1481328"/>
-            <a:ext cx="3474720" cy="457200"/>
-          </a:xfrm>
-          <a:prstGeom prst="rect">
-            <a:avLst/>
-          </a:prstGeom>
-          <a:noFill/>
-        </p:spPr>
-        <p:txBody>
-          <a:bodyPr wrap="square" anchor="t" lIns="0" rIns="0" tIns="0" bIns="0">
-            <a:spAutoFit/>
-          </a:bodyPr>
-          <a:lstStyle/>
-          <a:p>
-            <a:pPr algn="ctr"/>
-            <a:r>
-              <a:rPr sz="2400" b="1">
-                <a:solidFill>
-                  <a:srgbClr val="FFFFFF"/>
-                </a:solidFill>
-                <a:latin typeface="Calibri"/>
-              </a:rPr>
-              <a:t>SHARED</a:t>
-            </a:r>
-          </a:p>
-        </p:txBody>
-      </p:sp>
-      <p:sp>
-        <p:nvSpPr>
-          <p:cNvPr id="19" name="TextBox 18"/>
-          <p:cNvSpPr txBox="1"/>
-          <p:nvPr/>
-        </p:nvSpPr>
-        <p:spPr>
-          <a:xfrm>
-            <a:off x="4587087" y="2130552"/>
-            <a:ext cx="3017520" cy="228600"/>
-          </a:xfrm>
-          <a:prstGeom prst="rect">
-            <a:avLst/>
-          </a:prstGeom>
-          <a:noFill/>
-        </p:spPr>
-        <p:txBody>
-          <a:bodyPr wrap="square" anchor="t" lIns="0" rIns="0" tIns="0" bIns="0">
-            <a:spAutoFit/>
-          </a:bodyPr>
-          <a:lstStyle/>
-          <a:p>
-            <a:pPr algn="ctr"/>
-            <a:r>
-              <a:rPr sz="900" b="1">
-                <a:solidFill>
-                  <a:srgbClr val="6B7280"/>
-                </a:solidFill>
-                <a:latin typeface="Calibri"/>
-              </a:rPr>
-              <a:t>BASE FEE</a:t>
-            </a:r>
-          </a:p>
-        </p:txBody>
-      </p:sp>
-      <p:sp>
-        <p:nvSpPr>
-          <p:cNvPr id="20" name="TextBox 19"/>
-          <p:cNvSpPr txBox="1"/>
-          <p:nvPr/>
-        </p:nvSpPr>
-        <p:spPr>
-          <a:xfrm>
-            <a:off x="4587087" y="2368296"/>
-            <a:ext cx="3017520" cy="640080"/>
-          </a:xfrm>
-          <a:prstGeom prst="rect">
-            <a:avLst/>
-          </a:prstGeom>
-          <a:noFill/>
-        </p:spPr>
-        <p:txBody>
-          <a:bodyPr wrap="square" anchor="t" lIns="0" rIns="0" tIns="0" bIns="0">
-            <a:spAutoFit/>
-          </a:bodyPr>
-          <a:lstStyle/>
-          <a:p>
-            <a:pPr algn="ctr"/>
-            <a:r>
-              <a:rPr sz="1200" b="1">
-                <a:solidFill>
-                  <a:srgbClr val="111827"/>
-                </a:solidFill>
-                <a:latin typeface="Calibri"/>
-              </a:rPr>
-              <a:t>$3,000/mo flat
-(all platforms)</a:t>
-            </a:r>
-          </a:p>
-        </p:txBody>
-      </p:sp>
-      <p:sp>
-        <p:nvSpPr>
-          <p:cNvPr id="21" name="TextBox 20"/>
-          <p:cNvSpPr txBox="1"/>
-          <p:nvPr/>
-        </p:nvSpPr>
-        <p:spPr>
-          <a:xfrm>
-            <a:off x="4587087" y="3044952"/>
-            <a:ext cx="3017520" cy="228600"/>
-          </a:xfrm>
-          <a:prstGeom prst="rect">
-            <a:avLst/>
-          </a:prstGeom>
-          <a:noFill/>
-        </p:spPr>
-        <p:txBody>
-          <a:bodyPr wrap="square" anchor="t" lIns="0" rIns="0" tIns="0" bIns="0">
-            <a:spAutoFit/>
-          </a:bodyPr>
-          <a:lstStyle/>
-          <a:p>
-            <a:pPr algn="ctr"/>
-            <a:r>
-              <a:rPr sz="900" b="1">
-                <a:solidFill>
-                  <a:srgbClr val="6B7280"/>
-                </a:solidFill>
-                <a:latin typeface="Calibri"/>
-              </a:rPr>
-              <a:t>VARIABLE FEE</a:t>
-            </a:r>
-          </a:p>
-        </p:txBody>
-      </p:sp>
-      <p:sp>
-        <p:nvSpPr>
-          <p:cNvPr id="22" name="TextBox 21"/>
-          <p:cNvSpPr txBox="1"/>
-          <p:nvPr/>
-        </p:nvSpPr>
-        <p:spPr>
-          <a:xfrm>
-            <a:off x="4587087" y="3282696"/>
-            <a:ext cx="3017520" cy="640080"/>
-          </a:xfrm>
-          <a:prstGeom prst="rect">
-            <a:avLst/>
-          </a:prstGeom>
-          <a:noFill/>
-        </p:spPr>
-        <p:txBody>
-          <a:bodyPr wrap="square" anchor="t" lIns="0" rIns="0" tIns="0" bIns="0">
-            <a:spAutoFit/>
-          </a:bodyPr>
-          <a:lstStyle/>
-          <a:p>
-            <a:pPr algn="ctr"/>
-            <a:r>
-              <a:rPr sz="1200" b="1">
-                <a:solidFill>
-                  <a:srgbClr val="111827"/>
-                </a:solidFill>
-                <a:latin typeface="Calibri"/>
-              </a:rPr>
-              <a:t>10% of total combined
-ad spend</a:t>
-            </a:r>
-          </a:p>
-        </p:txBody>
-      </p:sp>
-      <p:sp>
-        <p:nvSpPr>
-          <p:cNvPr id="23" name="TextBox 22"/>
-          <p:cNvSpPr txBox="1"/>
-          <p:nvPr/>
-        </p:nvSpPr>
-        <p:spPr>
-          <a:xfrm>
-            <a:off x="4587087" y="3959352"/>
-            <a:ext cx="3017520" cy="228600"/>
-          </a:xfrm>
-          <a:prstGeom prst="rect">
-            <a:avLst/>
-          </a:prstGeom>
-          <a:noFill/>
-        </p:spPr>
-        <p:txBody>
-          <a:bodyPr wrap="square" anchor="t" lIns="0" rIns="0" tIns="0" bIns="0">
-            <a:spAutoFit/>
-          </a:bodyPr>
-          <a:lstStyle/>
-          <a:p>
-            <a:pPr algn="ctr"/>
-            <a:r>
-              <a:rPr sz="900" b="1">
-                <a:solidFill>
-                  <a:srgbClr val="6B7280"/>
-                </a:solidFill>
-                <a:latin typeface="Calibri"/>
-              </a:rPr>
-              <a:t>MONTHLY CAP</a:t>
-            </a:r>
-          </a:p>
-        </p:txBody>
-      </p:sp>
-      <p:sp>
-        <p:nvSpPr>
-          <p:cNvPr id="24" name="TextBox 23"/>
-          <p:cNvSpPr txBox="1"/>
-          <p:nvPr/>
-        </p:nvSpPr>
-        <p:spPr>
-          <a:xfrm>
-            <a:off x="4587087" y="4197096"/>
-            <a:ext cx="3017520" cy="640080"/>
-          </a:xfrm>
-          <a:prstGeom prst="rect">
-            <a:avLst/>
-          </a:prstGeom>
-          <a:noFill/>
-        </p:spPr>
-        <p:txBody>
-          <a:bodyPr wrap="square" anchor="t" lIns="0" rIns="0" tIns="0" bIns="0">
-            <a:spAutoFit/>
-          </a:bodyPr>
-          <a:lstStyle/>
-          <a:p>
-            <a:pPr algn="ctr"/>
-            <a:r>
-              <a:rPr sz="1200" b="1">
-                <a:solidFill>
-                  <a:srgbClr val="111827"/>
-                </a:solidFill>
-                <a:latin typeface="Calibri"/>
-              </a:rPr>
-              <a:t>$12,000 maximum</a:t>
-            </a:r>
-          </a:p>
-        </p:txBody>
-      </p:sp>
-      <p:sp>
-        <p:nvSpPr>
-          <p:cNvPr id="25" name="TextBox 24"/>
-          <p:cNvSpPr txBox="1"/>
-          <p:nvPr/>
-        </p:nvSpPr>
-        <p:spPr>
-          <a:xfrm>
-            <a:off x="4587087" y="4873752"/>
-            <a:ext cx="3017520" cy="228600"/>
-          </a:xfrm>
-          <a:prstGeom prst="rect">
-            <a:avLst/>
-          </a:prstGeom>
-          <a:noFill/>
-        </p:spPr>
-        <p:txBody>
-          <a:bodyPr wrap="square" anchor="t" lIns="0" rIns="0" tIns="0" bIns="0">
-            <a:spAutoFit/>
-          </a:bodyPr>
-          <a:lstStyle/>
-          <a:p>
-            <a:pPr algn="ctr"/>
-            <a:r>
-              <a:rPr sz="900" b="1">
-                <a:solidFill>
-                  <a:srgbClr val="6B7280"/>
-                </a:solidFill>
-                <a:latin typeface="Calibri"/>
-              </a:rPr>
-              <a:t>ONBOARDING</a:t>
-            </a:r>
-          </a:p>
-        </p:txBody>
-      </p:sp>
-      <p:sp>
-        <p:nvSpPr>
-          <p:cNvPr id="26" name="TextBox 25"/>
-          <p:cNvSpPr txBox="1"/>
-          <p:nvPr/>
-        </p:nvSpPr>
-        <p:spPr>
-          <a:xfrm>
-            <a:off x="4587087" y="5111496"/>
-            <a:ext cx="3017520" cy="640080"/>
-          </a:xfrm>
-          <a:prstGeom prst="rect">
-            <a:avLst/>
-          </a:prstGeom>
-          <a:noFill/>
-        </p:spPr>
-        <p:txBody>
-          <a:bodyPr wrap="square" anchor="t" lIns="0" rIns="0" tIns="0" bIns="0">
-            <a:spAutoFit/>
-          </a:bodyPr>
-          <a:lstStyle/>
-          <a:p>
-            <a:pPr algn="ctr"/>
-            <a:r>
-              <a:rPr sz="1200" b="1">
-                <a:solidFill>
-                  <a:srgbClr val="111827"/>
-                </a:solidFill>
-                <a:latin typeface="Calibri"/>
-              </a:rPr>
-              <a:t>$1,500 per platform</a:t>
-            </a:r>
-          </a:p>
-        </p:txBody>
-      </p:sp>
-      <p:sp>
-        <p:nvSpPr>
-          <p:cNvPr id="27" name="Rectangle 26"/>
-          <p:cNvSpPr/>
-          <p:nvPr/>
-        </p:nvSpPr>
-        <p:spPr>
-          <a:xfrm>
-            <a:off x="8153247" y="1188720"/>
-            <a:ext cx="3474720" cy="4572000"/>
-          </a:xfrm>
-          <a:prstGeom prst="rect">
-            <a:avLst/>
-          </a:prstGeom>
-          <a:solidFill>
-            <a:srgbClr val="F9FAFB"/>
-          </a:solidFill>
-          <a:ln w="9525">
-            <a:solidFill>
-              <a:srgbClr val="E5E7EB"/>
-            </a:solidFill>
-          </a:ln>
-          <a:effectLst/>
-        </p:spPr>
-        <p:style>
-          <a:lnRef idx="1">
-            <a:schemeClr val="accent1"/>
-          </a:lnRef>
-          <a:fillRef idx="3">
-            <a:schemeClr val="accent1"/>
-          </a:fillRef>
-          <a:effectRef idx="2">
-            <a:schemeClr val="accent1"/>
-          </a:effectRef>
-          <a:fontRef idx="minor">
-            <a:schemeClr val="lt1"/>
-          </a:fontRef>
-        </p:style>
-        <p:txBody>
-          <a:bodyPr rtlCol="0" anchor="ctr"/>
-          <a:lstStyle/>
-          <a:p>
-            <a:pPr algn="ctr"/>
-          </a:p>
-        </p:txBody>
-      </p:sp>
-      <p:sp>
-        <p:nvSpPr>
-          <p:cNvPr id="28" name="Rectangle 27"/>
-          <p:cNvSpPr/>
-          <p:nvPr/>
-        </p:nvSpPr>
-        <p:spPr>
-          <a:xfrm>
-            <a:off x="8153247" y="1188720"/>
-            <a:ext cx="3474720" cy="777240"/>
-          </a:xfrm>
-          <a:prstGeom prst="rect">
-            <a:avLst/>
-          </a:prstGeom>
-          <a:solidFill>
-            <a:srgbClr val="1A56DB"/>
-          </a:solidFill>
-          <a:ln>
-            <a:noFill/>
-          </a:ln>
-          <a:effectLst/>
-        </p:spPr>
-        <p:style>
-          <a:lnRef idx="1">
-            <a:schemeClr val="accent1"/>
-          </a:lnRef>
-          <a:fillRef idx="3">
-            <a:schemeClr val="accent1"/>
-          </a:fillRef>
-          <a:effectRef idx="2">
-            <a:schemeClr val="accent1"/>
-          </a:effectRef>
-          <a:fontRef idx="minor">
-            <a:schemeClr val="lt1"/>
-          </a:fontRef>
-        </p:style>
-        <p:txBody>
-          <a:bodyPr rtlCol="0" anchor="ctr"/>
-          <a:lstStyle/>
-          <a:p>
-            <a:pPr algn="ctr"/>
-          </a:p>
-        </p:txBody>
-      </p:sp>
-      <p:sp>
-        <p:nvSpPr>
-          <p:cNvPr id="29" name="TextBox 28"/>
-          <p:cNvSpPr txBox="1"/>
-          <p:nvPr/>
-        </p:nvSpPr>
-        <p:spPr>
-          <a:xfrm>
-            <a:off x="8153247" y="1234440"/>
-            <a:ext cx="3474720" cy="274320"/>
-          </a:xfrm>
-          <a:prstGeom prst="rect">
-            <a:avLst/>
-          </a:prstGeom>
-          <a:noFill/>
-        </p:spPr>
-        <p:txBody>
-          <a:bodyPr wrap="square" anchor="t" lIns="0" rIns="0" tIns="0" bIns="0">
-            <a:spAutoFit/>
-          </a:bodyPr>
-          <a:lstStyle/>
-          <a:p>
-            <a:pPr algn="ctr"/>
-            <a:r>
-              <a:rPr sz="1200" b="0">
-                <a:solidFill>
-                  <a:srgbClr val="FFFFFF"/>
-                </a:solidFill>
-                <a:latin typeface="Calibri"/>
-              </a:rPr>
-              <a:t>Plan C</a:t>
-            </a:r>
-          </a:p>
-        </p:txBody>
-      </p:sp>
-      <p:sp>
-        <p:nvSpPr>
-          <p:cNvPr id="30" name="TextBox 29"/>
-          <p:cNvSpPr txBox="1"/>
-          <p:nvPr/>
-        </p:nvSpPr>
-        <p:spPr>
-          <a:xfrm>
-            <a:off x="8153247" y="1481328"/>
-            <a:ext cx="3474720" cy="457200"/>
-          </a:xfrm>
-          <a:prstGeom prst="rect">
-            <a:avLst/>
-          </a:prstGeom>
-          <a:noFill/>
-        </p:spPr>
-        <p:txBody>
-          <a:bodyPr wrap="square" anchor="t" lIns="0" rIns="0" tIns="0" bIns="0">
-            <a:spAutoFit/>
-          </a:bodyPr>
-          <a:lstStyle/>
-          <a:p>
-            <a:pPr algn="ctr"/>
-            <a:r>
-              <a:rPr sz="2400" b="1">
-                <a:solidFill>
-                  <a:srgbClr val="FFFFFF"/>
-                </a:solidFill>
-                <a:latin typeface="Calibri"/>
-              </a:rPr>
-              <a:t>RETAINER</a:t>
-            </a:r>
-          </a:p>
-        </p:txBody>
-      </p:sp>
-      <p:sp>
-        <p:nvSpPr>
-          <p:cNvPr id="31" name="TextBox 30"/>
-          <p:cNvSpPr txBox="1"/>
-          <p:nvPr/>
-        </p:nvSpPr>
-        <p:spPr>
-          <a:xfrm>
-            <a:off x="8381847" y="2130552"/>
-            <a:ext cx="3017520" cy="228600"/>
-          </a:xfrm>
-          <a:prstGeom prst="rect">
-            <a:avLst/>
-          </a:prstGeom>
-          <a:noFill/>
-        </p:spPr>
-        <p:txBody>
-          <a:bodyPr wrap="square" anchor="t" lIns="0" rIns="0" tIns="0" bIns="0">
-            <a:spAutoFit/>
-          </a:bodyPr>
-          <a:lstStyle/>
-          <a:p>
-            <a:pPr algn="ctr"/>
-            <a:r>
-              <a:rPr sz="900" b="1">
-                <a:solidFill>
-                  <a:srgbClr val="6B7280"/>
-                </a:solidFill>
-                <a:latin typeface="Calibri"/>
-              </a:rPr>
-              <a:t>BASE FEE</a:t>
-            </a:r>
-          </a:p>
-        </p:txBody>
-      </p:sp>
-      <p:sp>
-        <p:nvSpPr>
-          <p:cNvPr id="32" name="TextBox 31"/>
-          <p:cNvSpPr txBox="1"/>
-          <p:nvPr/>
-        </p:nvSpPr>
-        <p:spPr>
-          <a:xfrm>
-            <a:off x="8381847" y="2368296"/>
-            <a:ext cx="3017520" cy="640080"/>
-          </a:xfrm>
-          <a:prstGeom prst="rect">
-            <a:avLst/>
-          </a:prstGeom>
-          <a:noFill/>
-        </p:spPr>
-        <p:txBody>
-          <a:bodyPr wrap="square" anchor="t" lIns="0" rIns="0" tIns="0" bIns="0">
-            <a:spAutoFit/>
-          </a:bodyPr>
-          <a:lstStyle/>
-          <a:p>
-            <a:pPr algn="ctr"/>
-            <a:r>
-              <a:rPr sz="1200" b="1">
-                <a:solidFill>
-                  <a:srgbClr val="111827"/>
-                </a:solidFill>
-                <a:latin typeface="Calibri"/>
-              </a:rPr>
-              <a:t>$10,000/mo flat
-(all platforms)</a:t>
-            </a:r>
-          </a:p>
-        </p:txBody>
-      </p:sp>
-      <p:sp>
-        <p:nvSpPr>
-          <p:cNvPr id="33" name="TextBox 32"/>
-          <p:cNvSpPr txBox="1"/>
-          <p:nvPr/>
-        </p:nvSpPr>
-        <p:spPr>
-          <a:xfrm>
-            <a:off x="8381847" y="3044952"/>
-            <a:ext cx="3017520" cy="228600"/>
-          </a:xfrm>
-          <a:prstGeom prst="rect">
-            <a:avLst/>
-          </a:prstGeom>
-          <a:noFill/>
-        </p:spPr>
-        <p:txBody>
-          <a:bodyPr wrap="square" anchor="t" lIns="0" rIns="0" tIns="0" bIns="0">
-            <a:spAutoFit/>
-          </a:bodyPr>
-          <a:lstStyle/>
-          <a:p>
-            <a:pPr algn="ctr"/>
-            <a:r>
-              <a:rPr sz="900" b="1">
-                <a:solidFill>
-                  <a:srgbClr val="6B7280"/>
-                </a:solidFill>
-                <a:latin typeface="Calibri"/>
-              </a:rPr>
-              <a:t>VARIABLE FEE</a:t>
-            </a:r>
-          </a:p>
-        </p:txBody>
-      </p:sp>
-      <p:sp>
-        <p:nvSpPr>
-          <p:cNvPr id="34" name="TextBox 33"/>
-          <p:cNvSpPr txBox="1"/>
-          <p:nvPr/>
-        </p:nvSpPr>
-        <p:spPr>
-          <a:xfrm>
-            <a:off x="8381847" y="3282696"/>
-            <a:ext cx="3017520" cy="640080"/>
-          </a:xfrm>
-          <a:prstGeom prst="rect">
-            <a:avLst/>
-          </a:prstGeom>
-          <a:noFill/>
-        </p:spPr>
-        <p:txBody>
-          <a:bodyPr wrap="square" anchor="t" lIns="0" rIns="0" tIns="0" bIns="0">
-            <a:spAutoFit/>
-          </a:bodyPr>
-          <a:lstStyle/>
-          <a:p>
-            <a:pPr algn="ctr"/>
-            <a:r>
-              <a:rPr sz="1200" b="1">
-                <a:solidFill>
-                  <a:srgbClr val="111827"/>
-                </a:solidFill>
-                <a:latin typeface="Calibri"/>
-              </a:rPr>
-              <a:t>None — 0% of ad spend</a:t>
-            </a:r>
-          </a:p>
-        </p:txBody>
-      </p:sp>
-      <p:sp>
-        <p:nvSpPr>
-          <p:cNvPr id="35" name="TextBox 34"/>
-          <p:cNvSpPr txBox="1"/>
-          <p:nvPr/>
-        </p:nvSpPr>
-        <p:spPr>
-          <a:xfrm>
-            <a:off x="8381847" y="3959352"/>
-            <a:ext cx="3017520" cy="228600"/>
-          </a:xfrm>
-          <a:prstGeom prst="rect">
-            <a:avLst/>
-          </a:prstGeom>
-          <a:noFill/>
-        </p:spPr>
-        <p:txBody>
-          <a:bodyPr wrap="square" anchor="t" lIns="0" rIns="0" tIns="0" bIns="0">
-            <a:spAutoFit/>
-          </a:bodyPr>
-          <a:lstStyle/>
-          <a:p>
-            <a:pPr algn="ctr"/>
-            <a:r>
-              <a:rPr sz="900" b="1">
-                <a:solidFill>
-                  <a:srgbClr val="6B7280"/>
-                </a:solidFill>
-                <a:latin typeface="Calibri"/>
-              </a:rPr>
-              <a:t>MONTHLY CAP</a:t>
-            </a:r>
-          </a:p>
-        </p:txBody>
-      </p:sp>
-      <p:sp>
-        <p:nvSpPr>
-          <p:cNvPr id="36" name="TextBox 35"/>
-          <p:cNvSpPr txBox="1"/>
-          <p:nvPr/>
-        </p:nvSpPr>
-        <p:spPr>
-          <a:xfrm>
-            <a:off x="8381847" y="4197096"/>
-            <a:ext cx="3017520" cy="640080"/>
-          </a:xfrm>
-          <a:prstGeom prst="rect">
-            <a:avLst/>
-          </a:prstGeom>
-          <a:noFill/>
-        </p:spPr>
-        <p:txBody>
-          <a:bodyPr wrap="square" anchor="t" lIns="0" rIns="0" tIns="0" bIns="0">
-            <a:spAutoFit/>
-          </a:bodyPr>
-          <a:lstStyle/>
-          <a:p>
-            <a:pPr algn="ctr"/>
-            <a:r>
-              <a:rPr sz="1200" b="1">
-                <a:solidFill>
-                  <a:srgbClr val="111827"/>
-                </a:solidFill>
-                <a:latin typeface="Calibri"/>
-              </a:rPr>
-              <a:t>N/A — fee is fixed</a:t>
-            </a:r>
-          </a:p>
-        </p:txBody>
-      </p:sp>
-      <p:sp>
-        <p:nvSpPr>
-          <p:cNvPr id="37" name="TextBox 36"/>
-          <p:cNvSpPr txBox="1"/>
-          <p:nvPr/>
-        </p:nvSpPr>
-        <p:spPr>
-          <a:xfrm>
-            <a:off x="8381847" y="4873752"/>
-            <a:ext cx="3017520" cy="228600"/>
-          </a:xfrm>
-          <a:prstGeom prst="rect">
-            <a:avLst/>
-          </a:prstGeom>
-          <a:noFill/>
-        </p:spPr>
-        <p:txBody>
-          <a:bodyPr wrap="square" anchor="t" lIns="0" rIns="0" tIns="0" bIns="0">
-            <a:spAutoFit/>
-          </a:bodyPr>
-          <a:lstStyle/>
-          <a:p>
-            <a:pPr algn="ctr"/>
-            <a:r>
-              <a:rPr sz="900" b="1">
-                <a:solidFill>
-                  <a:srgbClr val="6B7280"/>
-                </a:solidFill>
-                <a:latin typeface="Calibri"/>
-              </a:rPr>
-              <a:t>ONBOARDING</a:t>
-            </a:r>
-          </a:p>
-        </p:txBody>
-      </p:sp>
-      <p:sp>
-        <p:nvSpPr>
-          <p:cNvPr id="38" name="TextBox 37"/>
-          <p:cNvSpPr txBox="1"/>
-          <p:nvPr/>
-        </p:nvSpPr>
-        <p:spPr>
-          <a:xfrm>
-            <a:off x="8381847" y="5111496"/>
-            <a:ext cx="3017520" cy="640080"/>
-          </a:xfrm>
-          <a:prstGeom prst="rect">
-            <a:avLst/>
-          </a:prstGeom>
-          <a:noFill/>
-        </p:spPr>
-        <p:txBody>
-          <a:bodyPr wrap="square" anchor="t" lIns="0" rIns="0" tIns="0" bIns="0">
-            <a:spAutoFit/>
-          </a:bodyPr>
-          <a:lstStyle/>
-          <a:p>
-            <a:pPr algn="ctr"/>
-            <a:r>
-              <a:rPr sz="1200" b="1">
-                <a:solidFill>
-                  <a:srgbClr val="111827"/>
-                </a:solidFill>
-                <a:latin typeface="Calibri"/>
-              </a:rPr>
-              <a:t>$1,500 per platform</a:t>
-            </a:r>
-          </a:p>
-        </p:txBody>
-      </p:sp>
-      <p:sp>
-        <p:nvSpPr>
-          <p:cNvPr id="39" name="TextBox 38"/>
+          <p:cNvPr id="15" name="TextBox 14"/>
           <p:cNvSpPr txBox="1"/>
           <p:nvPr/>
         </p:nvSpPr>
@@ -4479,7 +3596,7 @@
                 </a:solidFill>
                 <a:latin typeface="Calibri"/>
               </a:rPr>
-              <a:t>Plan A has a $1,500 minimum fee per platform. This acts as a floor, covering your first $7,500 in ad spend. Once you spend over $7,500, the 20% rate naturally takes over.</a:t>
+              <a:t>The $1,500 minimum fee per platform acts as a floor, covering your first $7,500 in ad spend. Once you spend over $7,500, the 20% rate naturally takes over.</a:t>
             </a:r>
           </a:p>
         </p:txBody>
@@ -4532,7 +3649,7 @@
                 </a:solidFill>
                 <a:latin typeface="Calibri"/>
               </a:rPr>
-              <a:t>How the Plans Compare</a:t>
+              <a:t>How It Scales</a:t>
             </a:r>
           </a:p>
         </p:txBody>
@@ -4554,7 +3671,7 @@
         <p:spPr>
           <a:xfrm>
             <a:off x="838047" y="1097280"/>
-            <a:ext cx="10515600" cy="4741443"/>
+            <a:ext cx="10515600" cy="7201034"/>
           </a:xfrm>
           <a:prstGeom prst="rect">
             <a:avLst/>
@@ -4591,7 +3708,7 @@
                 </a:solidFill>
                 <a:latin typeface="Calibri"/>
               </a:rPr>
-              <a:t>Plans A and B cost exactly the same at $30,000/month in ad spend. As your budget scales past $60,000/month, Plan C (the flat retainer) becomes the most cost-effective option.</a:t>
+              <a:t>Your management fee scales with your ad spend. The percentage drops at $30,000 and again at $60,000 per platform. The $15,000 monthly cap means your costs are predictable even as you grow.</a:t>
             </a:r>
           </a:p>
         </p:txBody>
